--- a/TRANG WEB BÁN ĐỒ ĂN .pptx
+++ b/TRANG WEB BÁN ĐỒ ĂN .pptx
@@ -8,7 +8,7 @@
     <p:notesMasterId r:id="rId4"/>
   </p:notesMasterIdLst>
   <p:handoutMasterIdLst>
-    <p:handoutMasterId r:id="rId18"/>
+    <p:handoutMasterId r:id="rId17"/>
   </p:handoutMasterIdLst>
   <p:sldIdLst>
     <p:sldId id="317" r:id="rId3"/>
@@ -19,12 +19,11 @@
     <p:sldId id="319" r:id="rId9"/>
     <p:sldId id="320" r:id="rId10"/>
     <p:sldId id="263" r:id="rId11"/>
-    <p:sldId id="311" r:id="rId12"/>
-    <p:sldId id="321" r:id="rId13"/>
-    <p:sldId id="322" r:id="rId14"/>
-    <p:sldId id="323" r:id="rId15"/>
-    <p:sldId id="315" r:id="rId16"/>
-    <p:sldId id="304" r:id="rId17"/>
+    <p:sldId id="321" r:id="rId12"/>
+    <p:sldId id="322" r:id="rId13"/>
+    <p:sldId id="323" r:id="rId14"/>
+    <p:sldId id="315" r:id="rId15"/>
+    <p:sldId id="304" r:id="rId16"/>
   </p:sldIdLst>
   <p:sldSz cx="12192000" cy="6858000"/>
   <p:notesSz cx="6858000" cy="9144000"/>
@@ -955,84 +954,6 @@
 </file>
 
 <file path=ppt/notesSlides/notesSlide13.xml><?xml version="1.0" encoding="utf-8"?>
-<p:notes xmlns:a="http://schemas.openxmlformats.org/drawingml/2006/main" xmlns:r="http://schemas.openxmlformats.org/officeDocument/2006/relationships" xmlns:p="http://schemas.openxmlformats.org/presentationml/2006/main">
-  <p:cSld>
-    <p:spTree>
-      <p:nvGrpSpPr>
-        <p:cNvPr id="1" name=""/>
-        <p:cNvGrpSpPr/>
-        <p:nvPr/>
-      </p:nvGrpSpPr>
-      <p:grpSpPr>
-        <a:xfrm>
-          <a:off x="0" y="0"/>
-          <a:ext cx="0" cy="0"/>
-          <a:chOff x="0" y="0"/>
-          <a:chExt cx="0" cy="0"/>
-        </a:xfrm>
-      </p:grpSpPr>
-      <p:sp>
-        <p:nvSpPr>
-          <p:cNvPr id="2" name="Slide Image Placeholder 1"/>
-          <p:cNvSpPr>
-            <a:spLocks noGrp="1" noRot="1" noChangeAspect="1"/>
-          </p:cNvSpPr>
-          <p:nvPr>
-            <p:ph type="sldImg"/>
-          </p:nvPr>
-        </p:nvSpPr>
-        <p:spPr/>
-      </p:sp>
-      <p:sp>
-        <p:nvSpPr>
-          <p:cNvPr id="3" name="Notes Placeholder 2"/>
-          <p:cNvSpPr>
-            <a:spLocks noGrp="1"/>
-          </p:cNvSpPr>
-          <p:nvPr>
-            <p:ph type="body" idx="1"/>
-          </p:nvPr>
-        </p:nvSpPr>
-        <p:spPr/>
-        <p:txBody>
-          <a:bodyPr/>
-          <a:lstStyle/>
-          <a:p>
-            <a:endParaRPr lang="en-US" dirty="0"/>
-          </a:p>
-        </p:txBody>
-      </p:sp>
-      <p:sp>
-        <p:nvSpPr>
-          <p:cNvPr id="4" name="Slide Number Placeholder 3"/>
-          <p:cNvSpPr>
-            <a:spLocks noGrp="1"/>
-          </p:cNvSpPr>
-          <p:nvPr>
-            <p:ph type="sldNum" sz="quarter" idx="5"/>
-          </p:nvPr>
-        </p:nvSpPr>
-        <p:spPr/>
-        <p:txBody>
-          <a:bodyPr/>
-          <a:lstStyle/>
-          <a:p>
-            <a:fld id="{7C366290-4595-5745-A50F-D5EC13BAC604}" type="slidenum">
-              <a:rPr lang="en-US" noProof="0" smtClean="0"/>
-            </a:fld>
-            <a:endParaRPr lang="en-US" noProof="0" dirty="0"/>
-          </a:p>
-        </p:txBody>
-      </p:sp>
-    </p:spTree>
-  </p:cSld>
-  <p:clrMapOvr>
-    <a:masterClrMapping/>
-  </p:clrMapOvr>
-</p:notes>
-</file>
-
-<file path=ppt/notesSlides/notesSlide14.xml><?xml version="1.0" encoding="utf-8"?>
 <p:notes xmlns:a="http://schemas.openxmlformats.org/drawingml/2006/main" xmlns:r="http://schemas.openxmlformats.org/officeDocument/2006/relationships" xmlns:p="http://schemas.openxmlformats.org/presentationml/2006/main">
   <p:cSld>
     <p:spTree>
@@ -26775,217 +26696,6 @@
                 <a:latin typeface="Arial" panose="020B0604020202020204" pitchFamily="34" charset="0"/>
                 <a:cs typeface="Arial" panose="020B0604020202020204" pitchFamily="34" charset="0"/>
               </a:rPr>
-              <a:t>Chức năng thực đơn</a:t>
-            </a:r>
-            <a:endParaRPr lang="en-US" dirty="0">
-              <a:latin typeface="Arial" panose="020B0604020202020204" pitchFamily="34" charset="0"/>
-              <a:cs typeface="Arial" panose="020B0604020202020204" pitchFamily="34" charset="0"/>
-            </a:endParaRPr>
-          </a:p>
-        </p:txBody>
-      </p:sp>
-      <p:sp>
-        <p:nvSpPr>
-          <p:cNvPr id="12" name="Content Placeholder 11"/>
-          <p:cNvSpPr>
-            <a:spLocks noGrp="1"/>
-          </p:cNvSpPr>
-          <p:nvPr>
-            <p:ph sz="quarter" idx="13"/>
-          </p:nvPr>
-        </p:nvSpPr>
-        <p:spPr>
-          <a:xfrm>
-            <a:off x="914399" y="2039112"/>
-            <a:ext cx="3364992" cy="3904488"/>
-          </a:xfrm>
-        </p:spPr>
-        <p:txBody>
-          <a:bodyPr/>
-          <a:lstStyle/>
-          <a:p>
-            <a:pPr marL="0" indent="0">
-              <a:buNone/>
-            </a:pPr>
-            <a:r>
-              <a:rPr lang="vi-VN" dirty="0">
-                <a:latin typeface="Arial" panose="020B0604020202020204" pitchFamily="34" charset="0"/>
-                <a:cs typeface="Arial" panose="020B0604020202020204" pitchFamily="34" charset="0"/>
-              </a:rPr>
-              <a:t>- Lợi ích:</a:t>
-            </a:r>
-            <a:endParaRPr lang="vi-VN" dirty="0">
-              <a:latin typeface="Arial" panose="020B0604020202020204" pitchFamily="34" charset="0"/>
-              <a:cs typeface="Arial" panose="020B0604020202020204" pitchFamily="34" charset="0"/>
-            </a:endParaRPr>
-          </a:p>
-          <a:p>
-            <a:r>
-              <a:rPr lang="vi-VN" dirty="0">
-                <a:latin typeface="Arial" panose="020B0604020202020204" pitchFamily="34" charset="0"/>
-                <a:cs typeface="Arial" panose="020B0604020202020204" pitchFamily="34" charset="0"/>
-              </a:rPr>
-              <a:t>Giúp người dùng dễ dàng xem thông tin món ăn</a:t>
-            </a:r>
-            <a:endParaRPr lang="vi-VN" dirty="0">
-              <a:latin typeface="Arial" panose="020B0604020202020204" pitchFamily="34" charset="0"/>
-              <a:cs typeface="Arial" panose="020B0604020202020204" pitchFamily="34" charset="0"/>
-            </a:endParaRPr>
-          </a:p>
-          <a:p>
-            <a:r>
-              <a:rPr lang="vi-VN" dirty="0">
-                <a:latin typeface="Arial" panose="020B0604020202020204" pitchFamily="34" charset="0"/>
-                <a:cs typeface="Arial" panose="020B0604020202020204" pitchFamily="34" charset="0"/>
-              </a:rPr>
-              <a:t>Hỗ trợ lựa chọn và đặt món nhanh chóng</a:t>
-            </a:r>
-            <a:endParaRPr lang="vi-VN" dirty="0">
-              <a:latin typeface="Arial" panose="020B0604020202020204" pitchFamily="34" charset="0"/>
-              <a:cs typeface="Arial" panose="020B0604020202020204" pitchFamily="34" charset="0"/>
-            </a:endParaRPr>
-          </a:p>
-          <a:p>
-            <a:r>
-              <a:rPr lang="vi-VN" dirty="0">
-                <a:latin typeface="Arial" panose="020B0604020202020204" pitchFamily="34" charset="0"/>
-                <a:cs typeface="Arial" panose="020B0604020202020204" pitchFamily="34" charset="0"/>
-              </a:rPr>
-              <a:t>Tiết kiệm thời gian trong quá trình mua hàng</a:t>
-            </a:r>
-            <a:endParaRPr lang="vi-VN" dirty="0">
-              <a:latin typeface="Arial" panose="020B0604020202020204" pitchFamily="34" charset="0"/>
-              <a:cs typeface="Arial" panose="020B0604020202020204" pitchFamily="34" charset="0"/>
-            </a:endParaRPr>
-          </a:p>
-          <a:p>
-            <a:r>
-              <a:rPr lang="vi-VN" dirty="0">
-                <a:latin typeface="Arial" panose="020B0604020202020204" pitchFamily="34" charset="0"/>
-                <a:cs typeface="Arial" panose="020B0604020202020204" pitchFamily="34" charset="0"/>
-              </a:rPr>
-              <a:t>Tăng sự thuận tiện và trải nghiệm sử dụng hệ thống</a:t>
-            </a:r>
-            <a:endParaRPr lang="en-US" dirty="0">
-              <a:latin typeface="Arial" panose="020B0604020202020204" pitchFamily="34" charset="0"/>
-              <a:cs typeface="Arial" panose="020B0604020202020204" pitchFamily="34" charset="0"/>
-            </a:endParaRPr>
-          </a:p>
-        </p:txBody>
-      </p:sp>
-      <p:sp>
-        <p:nvSpPr>
-          <p:cNvPr id="25" name="Content Placeholder 24"/>
-          <p:cNvSpPr>
-            <a:spLocks noGrp="1"/>
-          </p:cNvSpPr>
-          <p:nvPr>
-            <p:ph sz="quarter" idx="12"/>
-          </p:nvPr>
-        </p:nvSpPr>
-        <p:spPr>
-          <a:xfrm>
-            <a:off x="4743451" y="2039112"/>
-            <a:ext cx="6537960" cy="3904488"/>
-          </a:xfrm>
-        </p:spPr>
-        <p:txBody>
-          <a:bodyPr/>
-          <a:lstStyle/>
-          <a:p>
-            <a:r>
-              <a:rPr lang="vi-VN" dirty="0">
-                <a:latin typeface="Arial" panose="020B0604020202020204" pitchFamily="34" charset="0"/>
-                <a:cs typeface="Arial" panose="020B0604020202020204" pitchFamily="34" charset="0"/>
-              </a:rPr>
-              <a:t>Mô tả chức năng: Chức năng thực đơn cho </a:t>
-            </a:r>
-            <a:r>
-              <a:rPr lang="vi-VN" dirty="0">
-                <a:latin typeface="Arial" panose="020B0604020202020204" pitchFamily="34" charset="0"/>
-                <a:cs typeface="Arial" panose="020B0604020202020204" pitchFamily="34" charset="0"/>
-              </a:rPr>
-              <a:t>phép người dùng xem toàn bộ các món ăn và đồ uống hiện có tại căn tin. Mỗi món ăn được hiển thị kèm hình ảnh , mô tả, giá tiền ,số lượng và nút đặt món, hệ thống sẽ chuyển món ăn đã chọn sang trang thanh toán </a:t>
-            </a:r>
-            <a:endParaRPr lang="en-US" dirty="0">
-              <a:latin typeface="Arial" panose="020B0604020202020204" pitchFamily="34" charset="0"/>
-              <a:cs typeface="Arial" panose="020B0604020202020204" pitchFamily="34" charset="0"/>
-            </a:endParaRPr>
-          </a:p>
-        </p:txBody>
-      </p:sp>
-      <p:sp>
-        <p:nvSpPr>
-          <p:cNvPr id="5" name="Slide Number Placeholder 4"/>
-          <p:cNvSpPr>
-            <a:spLocks noGrp="1"/>
-          </p:cNvSpPr>
-          <p:nvPr>
-            <p:ph type="sldNum" sz="quarter" idx="4"/>
-          </p:nvPr>
-        </p:nvSpPr>
-        <p:spPr>
-          <a:xfrm>
-            <a:off x="11353800" y="5879804"/>
-            <a:ext cx="661416" cy="895899"/>
-          </a:xfrm>
-        </p:spPr>
-        <p:txBody>
-          <a:bodyPr/>
-          <a:lstStyle/>
-          <a:p>
-            <a:fld id="{58FB4751-880F-D840-AAA9-3A15815CC996}" type="slidenum">
-              <a:rPr lang="en-US" smtClean="0"/>
-            </a:fld>
-            <a:endParaRPr lang="en-US" dirty="0"/>
-          </a:p>
-        </p:txBody>
-      </p:sp>
-    </p:spTree>
-  </p:cSld>
-  <p:clrMapOvr>
-    <a:masterClrMapping/>
-  </p:clrMapOvr>
-</p:sld>
-</file>
-
-<file path=ppt/slides/slide11.xml><?xml version="1.0" encoding="utf-8"?>
-<p:sld xmlns:a="http://schemas.openxmlformats.org/drawingml/2006/main" xmlns:r="http://schemas.openxmlformats.org/officeDocument/2006/relationships" xmlns:p="http://schemas.openxmlformats.org/presentationml/2006/main">
-  <p:cSld>
-    <p:spTree>
-      <p:nvGrpSpPr>
-        <p:cNvPr id="1" name=""/>
-        <p:cNvGrpSpPr/>
-        <p:nvPr/>
-      </p:nvGrpSpPr>
-      <p:grpSpPr>
-        <a:xfrm>
-          <a:off x="0" y="0"/>
-          <a:ext cx="0" cy="0"/>
-          <a:chOff x="0" y="0"/>
-          <a:chExt cx="0" cy="0"/>
-        </a:xfrm>
-      </p:grpSpPr>
-      <p:sp>
-        <p:nvSpPr>
-          <p:cNvPr id="11" name="Title 10"/>
-          <p:cNvSpPr>
-            <a:spLocks noGrp="1"/>
-          </p:cNvSpPr>
-          <p:nvPr>
-            <p:ph type="title"/>
-          </p:nvPr>
-        </p:nvSpPr>
-        <p:spPr/>
-        <p:txBody>
-          <a:bodyPr/>
-          <a:lstStyle/>
-          <a:p>
-            <a:r>
-              <a:rPr lang="vi-VN" dirty="0">
-                <a:latin typeface="Arial" panose="020B0604020202020204" pitchFamily="34" charset="0"/>
-                <a:cs typeface="Arial" panose="020B0604020202020204" pitchFamily="34" charset="0"/>
-              </a:rPr>
               <a:t>Chức năng thanh toán</a:t>
             </a:r>
             <a:endParaRPr lang="en-US" dirty="0">
@@ -27845,7 +27555,7 @@
 </p:sld>
 </file>
 
-<file path=ppt/slides/slide12.xml><?xml version="1.0" encoding="utf-8"?>
+<file path=ppt/slides/slide11.xml><?xml version="1.0" encoding="utf-8"?>
 <p:sld xmlns:a="http://schemas.openxmlformats.org/drawingml/2006/main" xmlns:r="http://schemas.openxmlformats.org/officeDocument/2006/relationships" xmlns:p="http://schemas.openxmlformats.org/presentationml/2006/main">
   <p:cSld>
     <p:spTree>
@@ -28348,7 +28058,7 @@
 </p:sld>
 </file>
 
-<file path=ppt/slides/slide13.xml><?xml version="1.0" encoding="utf-8"?>
+<file path=ppt/slides/slide12.xml><?xml version="1.0" encoding="utf-8"?>
 <p:sld xmlns:a="http://schemas.openxmlformats.org/drawingml/2006/main" xmlns:r="http://schemas.openxmlformats.org/officeDocument/2006/relationships" xmlns:p="http://schemas.openxmlformats.org/presentationml/2006/main">
   <p:cSld>
     <p:spTree>
@@ -28551,7 +28261,7 @@
 </p:sld>
 </file>
 
-<file path=ppt/slides/slide14.xml><?xml version="1.0" encoding="utf-8"?>
+<file path=ppt/slides/slide13.xml><?xml version="1.0" encoding="utf-8"?>
 <p:sld xmlns:a="http://schemas.openxmlformats.org/drawingml/2006/main" xmlns:r="http://schemas.openxmlformats.org/officeDocument/2006/relationships" xmlns:p="http://schemas.openxmlformats.org/presentationml/2006/main">
   <p:cSld>
     <p:bg>
@@ -29921,7 +29631,14 @@
                 <a:latin typeface="Arial" panose="020B0604020202020204" pitchFamily="34" charset="0"/>
                 <a:cs typeface="Arial" panose="020B0604020202020204" pitchFamily="34" charset="0"/>
               </a:rPr>
-              <a:t>Chức năng trang chủ</a:t>
+              <a:t>Chức năng thực đơn-đặt </a:t>
+            </a:r>
+            <a:r>
+              <a:rPr lang="vi-VN" dirty="0">
+                <a:latin typeface="Arial" panose="020B0604020202020204" pitchFamily="34" charset="0"/>
+                <a:cs typeface="Arial" panose="020B0604020202020204" pitchFamily="34" charset="0"/>
+              </a:rPr>
+              <a:t>món</a:t>
             </a:r>
             <a:endParaRPr lang="vi-VN" dirty="0">
               <a:latin typeface="Arial" panose="020B0604020202020204" pitchFamily="34" charset="0"/>
@@ -29954,15 +29671,11 @@
               <a:buNone/>
             </a:pPr>
             <a:r>
-              <a:rPr lang="vi-VN" dirty="0"/>
-              <a:t>- </a:t>
-            </a:r>
-            <a:r>
               <a:rPr lang="vi-VN" dirty="0">
                 <a:latin typeface="Arial" panose="020B0604020202020204" pitchFamily="34" charset="0"/>
                 <a:cs typeface="Arial" panose="020B0604020202020204" pitchFamily="34" charset="0"/>
               </a:rPr>
-              <a:t>Lợi ích:</a:t>
+              <a:t>- Lợi ích:</a:t>
             </a:r>
             <a:endParaRPr lang="vi-VN" dirty="0">
               <a:latin typeface="Arial" panose="020B0604020202020204" pitchFamily="34" charset="0"/>
@@ -29975,7 +29688,7 @@
                 <a:latin typeface="Arial" panose="020B0604020202020204" pitchFamily="34" charset="0"/>
                 <a:cs typeface="Arial" panose="020B0604020202020204" pitchFamily="34" charset="0"/>
               </a:rPr>
-              <a:t>Cập nhật thông tin món ăn nhanh chóng</a:t>
+              <a:t>Giúp người dùng dễ dàng xem thông tin món ăn</a:t>
             </a:r>
             <a:endParaRPr lang="vi-VN" dirty="0">
               <a:latin typeface="Arial" panose="020B0604020202020204" pitchFamily="34" charset="0"/>
@@ -29988,7 +29701,7 @@
                 <a:latin typeface="Arial" panose="020B0604020202020204" pitchFamily="34" charset="0"/>
                 <a:cs typeface="Arial" panose="020B0604020202020204" pitchFamily="34" charset="0"/>
               </a:rPr>
-              <a:t>Tăng trải nghiệm người dùng</a:t>
+              <a:t>Hỗ trợ lựa chọn và đặt món nhanh chóng</a:t>
             </a:r>
             <a:endParaRPr lang="vi-VN" dirty="0">
               <a:latin typeface="Arial" panose="020B0604020202020204" pitchFamily="34" charset="0"/>
@@ -30001,7 +29714,20 @@
                 <a:latin typeface="Arial" panose="020B0604020202020204" pitchFamily="34" charset="0"/>
                 <a:cs typeface="Arial" panose="020B0604020202020204" pitchFamily="34" charset="0"/>
               </a:rPr>
-              <a:t>Giúp căn tin giới thiệu các món ăn mới hiệu quả hơn</a:t>
+              <a:t>Tiết kiệm thời gian trong quá trình mua hàng</a:t>
+            </a:r>
+            <a:endParaRPr lang="vi-VN" dirty="0">
+              <a:latin typeface="Arial" panose="020B0604020202020204" pitchFamily="34" charset="0"/>
+              <a:cs typeface="Arial" panose="020B0604020202020204" pitchFamily="34" charset="0"/>
+            </a:endParaRPr>
+          </a:p>
+          <a:p>
+            <a:r>
+              <a:rPr lang="vi-VN" dirty="0">
+                <a:latin typeface="Arial" panose="020B0604020202020204" pitchFamily="34" charset="0"/>
+                <a:cs typeface="Arial" panose="020B0604020202020204" pitchFamily="34" charset="0"/>
+              </a:rPr>
+              <a:t>Tăng sự thuận tiện và trải nghiệm sử dụng hệ thống</a:t>
             </a:r>
             <a:endParaRPr lang="en-US" dirty="0">
               <a:latin typeface="Arial" panose="020B0604020202020204" pitchFamily="34" charset="0"/>
@@ -30035,28 +29761,14 @@
                 <a:latin typeface="Arial" panose="020B0604020202020204" pitchFamily="34" charset="0"/>
                 <a:cs typeface="Arial" panose="020B0604020202020204" pitchFamily="34" charset="0"/>
               </a:rPr>
-              <a:t>Mô tả chức năng</a:t>
-            </a:r>
-            <a:r>
-              <a:rPr lang="en-US" dirty="0">
-                <a:latin typeface="Arial" panose="020B0604020202020204" pitchFamily="34" charset="0"/>
-                <a:cs typeface="Arial" panose="020B0604020202020204" pitchFamily="34" charset="0"/>
-              </a:rPr>
-              <a:t>:</a:t>
+              <a:t>Mô tả chức năng: Chức năng thực đơn cho </a:t>
             </a:r>
             <a:r>
               <a:rPr lang="vi-VN" dirty="0">
                 <a:latin typeface="Arial" panose="020B0604020202020204" pitchFamily="34" charset="0"/>
                 <a:cs typeface="Arial" panose="020B0604020202020204" pitchFamily="34" charset="0"/>
               </a:rPr>
-              <a:t> Chức năng này cho phép người dùng xem danh sách các món ăn mới, món nổi </a:t>
-            </a:r>
-            <a:r>
-              <a:rPr lang="vi-VN" dirty="0">
-                <a:latin typeface="Arial" panose="020B0604020202020204" pitchFamily="34" charset="0"/>
-                <a:cs typeface="Arial" panose="020B0604020202020204" pitchFamily="34" charset="0"/>
-              </a:rPr>
-              <a:t>bật tại căn tin. Các món mới sẽ hiễn thị trên trang chủ để sinh viên dễ dàng theo dõi và lựa chọn</a:t>
+              <a:t>phép người dùng xem toàn bộ các món ăn và đồ uống hiện có tại căn tin. Mỗi món ăn được hiển thị kèm hình ảnh , mô tả, giá tiền ,số lượng và nút đặt món, hệ thống sẽ chuyển món ăn đã chọn sang trang thanh toán </a:t>
             </a:r>
             <a:endParaRPr lang="en-US" dirty="0">
               <a:latin typeface="Arial" panose="020B0604020202020204" pitchFamily="34" charset="0"/>
